--- a/STM.pptx
+++ b/STM.pptx
@@ -3356,7 +3356,7 @@
           <a:lstStyle/>
           <a:p>
             <a:r>
-              <a:rPr lang="en-US" sz="2800" i="1" dirty="0">
+              <a:rPr lang="en-US" sz="2800" i="1">
                 <a:solidFill>
                   <a:srgbClr val="E8E6E1"/>
                 </a:solidFill>
@@ -3364,7 +3364,18 @@
                 <a:ea typeface="Georgia" pitchFamily="34" charset="-122"/>
                 <a:cs typeface="Georgia" pitchFamily="34" charset="-120"/>
               </a:rPr>
-              <a:t>https://github.com/Odegard19/Projectnn1/upload</a:t>
+              <a:t>https</a:t>
+            </a:r>
+            <a:r>
+              <a:rPr lang="en-US" sz="2800" i="1" dirty="0">
+                <a:solidFill>
+                  <a:srgbClr val="E8E6E1"/>
+                </a:solidFill>
+                <a:latin typeface="Georgia" pitchFamily="34" charset="0"/>
+                <a:ea typeface="Georgia" pitchFamily="34" charset="-122"/>
+                <a:cs typeface="Georgia" pitchFamily="34" charset="-120"/>
+              </a:rPr>
+              <a:t>://github.com/Odegard19/Projectnn1</a:t>
             </a:r>
             <a:endParaRPr lang="en-US" sz="2800" dirty="0"/>
           </a:p>
